--- a/slides/slide_03.pptx
+++ b/slides/slide_03.pptx
@@ -26,61 +26,38 @@
       <p:bold r:id="rId9"/>
     </p:embeddedFont>
     <p:embeddedFont>
-      <p:font typeface="Bebas Neue" panose="020B0606020202050201" pitchFamily="2" charset="0"/>
+      <p:font typeface="Hanken Grotesk" panose="020B0604020202020204" charset="0"/>
       <p:regular r:id="rId10"/>
-    </p:embeddedFont>
-    <p:embeddedFont>
-      <p:font typeface="DM Mono" panose="020B0509040201040103" pitchFamily="1" charset="0"/>
-      <p:regular r:id="rId11"/>
+      <p:bold r:id="rId11"/>
       <p:italic r:id="rId12"/>
-    </p:embeddedFont>
-    <p:embeddedFont>
-      <p:font typeface="Hanken Grotesk" panose="020B0604020202020204" charset="0"/>
-      <p:regular r:id="rId13"/>
-      <p:bold r:id="rId14"/>
-      <p:italic r:id="rId15"/>
-      <p:boldItalic r:id="rId16"/>
-    </p:embeddedFont>
-    <p:embeddedFont>
-      <p:font typeface="Open Sans" panose="020B0606030504020204" pitchFamily="2" charset="0"/>
-      <p:regular r:id="rId17"/>
-      <p:bold r:id="rId18"/>
-      <p:italic r:id="rId19"/>
-      <p:boldItalic r:id="rId20"/>
+      <p:boldItalic r:id="rId13"/>
     </p:embeddedFont>
     <p:embeddedFont>
       <p:font typeface="Raleway" pitchFamily="2" charset="0"/>
-      <p:regular r:id="rId21"/>
-      <p:bold r:id="rId22"/>
-      <p:italic r:id="rId23"/>
-      <p:boldItalic r:id="rId24"/>
+      <p:regular r:id="rId14"/>
+      <p:bold r:id="rId15"/>
+      <p:italic r:id="rId16"/>
+      <p:boldItalic r:id="rId17"/>
     </p:embeddedFont>
     <p:embeddedFont>
       <p:font typeface="Raleway Black" pitchFamily="2" charset="0"/>
-      <p:bold r:id="rId25"/>
-      <p:boldItalic r:id="rId26"/>
+      <p:bold r:id="rId18"/>
+      <p:boldItalic r:id="rId19"/>
     </p:embeddedFont>
     <p:embeddedFont>
       <p:font typeface="Raleway ExtraBold" pitchFamily="2" charset="0"/>
-      <p:bold r:id="rId27"/>
-      <p:boldItalic r:id="rId28"/>
+      <p:bold r:id="rId20"/>
+      <p:boldItalic r:id="rId21"/>
     </p:embeddedFont>
     <p:embeddedFont>
       <p:font typeface="Roboto Medium" panose="02000000000000000000" pitchFamily="2" charset="0"/>
-      <p:regular r:id="rId29"/>
-      <p:italic r:id="rId30"/>
+      <p:regular r:id="rId22"/>
+      <p:italic r:id="rId23"/>
     </p:embeddedFont>
     <p:embeddedFont>
       <p:font typeface="Roboto" panose="02000000000000000000" pitchFamily="2"/>
-      <p:bold r:id="rId31"/>
-      <p:boldItalic r:id="rId32"/>
-    </p:embeddedFont>
-    <p:embeddedFont>
-      <p:font typeface="Segoe UI" panose="020B0502040204020203" pitchFamily="2" charset="0"/>
-      <p:regular r:id="rId33"/>
-      <p:bold r:id="rId34"/>
-      <p:italic r:id="rId35"/>
-      <p:boldItalic r:id="rId36"/>
+      <p:bold r:id="rId24"/>
+      <p:boldItalic r:id="rId25"/>
     </p:embeddedFont>
   </p:embeddedFontLst>
   <p:custDataLst>
@@ -884,7 +861,7 @@
           <a:bodyPr/>
           <a:lstStyle/>
           <a:p>
-            <a:fld id="{6F68F6DD-37DE-4A3D-8430-AEAD05E44771}" type="datetimeFigureOut">
+            <a:fld id="{D203482D-702D-48DA-986A-E101B90E321C}" type="datetimeFigureOut">
               <a:rPr lang="en-US" smtClean="0"/>
               <a:t>11/7/2009</a:t>
             </a:fld>
@@ -1048,7 +1025,7 @@
           <a:bodyPr/>
           <a:lstStyle/>
           <a:p>
-            <a:fld id="{18DED975-A36F-46B3-9DF4-93B1314619D4}" type="datetimeFigureOut">
+            <a:fld id="{881EAEB2-2DD5-48D3-B6E9-9C68DA3531A0}" type="datetimeFigureOut">
               <a:rPr lang="en-US" smtClean="0"/>
               <a:t>11/7/2009</a:t>
             </a:fld>
@@ -1212,7 +1189,7 @@
           <a:bodyPr/>
           <a:lstStyle/>
           <a:p>
-            <a:fld id="{46C9E493-4CD0-4B0F-A43D-E46CF80448E8}" type="datetimeFigureOut">
+            <a:fld id="{623E786C-813F-4408-8CE1-DC08DFECCD29}" type="datetimeFigureOut">
               <a:rPr lang="en-US" smtClean="0"/>
               <a:t>11/7/2009</a:t>
             </a:fld>
@@ -13117,7 +13094,7 @@
           <a:bodyPr/>
           <a:lstStyle/>
           <a:p>
-            <a:fld id="{93072BDE-1144-4A5C-9F71-AD659D343E26}" type="datetimeFigureOut">
+            <a:fld id="{9387875E-301A-421F-AAF8-59D3D47E7A19}" type="datetimeFigureOut">
               <a:rPr lang="en-US" smtClean="0"/>
               <a:t>11/7/2009</a:t>
             </a:fld>
@@ -33218,7 +33195,7 @@
           <a:bodyPr/>
           <a:lstStyle/>
           <a:p>
-            <a:fld id="{C2E5F52E-3473-43DD-9763-8A458B1F526F}" type="datetimeFigureOut">
+            <a:fld id="{C7DA3EE4-4C21-4006-A856-AA77DA46ECE0}" type="datetimeFigureOut">
               <a:rPr lang="en-US" smtClean="0"/>
               <a:t>11/7/2009</a:t>
             </a:fld>
@@ -38865,7 +38842,7 @@
           <a:bodyPr/>
           <a:lstStyle/>
           <a:p>
-            <a:fld id="{D1E25813-9FB9-47F6-8977-19CE515FB8AF}" type="datetimeFigureOut">
+            <a:fld id="{B2730DA2-37F9-4DD1-A1C1-67B3AAA89172}" type="datetimeFigureOut">
               <a:rPr lang="en-US" smtClean="0"/>
               <a:t>11/7/2009</a:t>
             </a:fld>
@@ -39254,7 +39231,7 @@
           <a:bodyPr/>
           <a:lstStyle/>
           <a:p>
-            <a:fld id="{61D71EA1-F346-4AD0-BCC3-84DD730D25CB}" type="datetimeFigureOut">
+            <a:fld id="{1C60ED97-E6E1-4AD2-AFF6-1AAA0AA552F0}" type="datetimeFigureOut">
               <a:rPr lang="en-US" smtClean="0"/>
               <a:t>11/7/2009</a:t>
             </a:fld>
@@ -39367,7 +39344,7 @@
           <a:bodyPr/>
           <a:lstStyle/>
           <a:p>
-            <a:fld id="{77B750A0-7B3D-4653-AB95-32EE4B06A275}" type="datetimeFigureOut">
+            <a:fld id="{A911F494-65CB-43D4-B400-4DD5585343EC}" type="datetimeFigureOut">
               <a:rPr lang="en-US" smtClean="0"/>
               <a:t>11/7/2009</a:t>
             </a:fld>
@@ -39457,7 +39434,7 @@
           <a:bodyPr/>
           <a:lstStyle/>
           <a:p>
-            <a:fld id="{DA3D3B32-29C3-4210-A64F-263F9A1F49CF}" type="datetimeFigureOut">
+            <a:fld id="{5CFB43F6-121C-499C-8F49-7ABD822A521A}" type="datetimeFigureOut">
               <a:rPr lang="en-US" smtClean="0"/>
               <a:t>11/7/2009</a:t>
             </a:fld>
@@ -39712,7 +39689,7 @@
           <a:bodyPr/>
           <a:lstStyle/>
           <a:p>
-            <a:fld id="{C32C07D5-B3D0-46DB-9A0F-EE6BAA404987}" type="datetimeFigureOut">
+            <a:fld id="{34C3BCE5-53CB-4BF3-A071-2AF9A301166C}" type="datetimeFigureOut">
               <a:rPr lang="en-US" smtClean="0"/>
               <a:t>11/7/2009</a:t>
             </a:fld>
@@ -39944,7 +39921,7 @@
           <a:bodyPr/>
           <a:lstStyle/>
           <a:p>
-            <a:fld id="{ACA88E1F-E5CE-46E9-92E4-1881A1431769}" type="datetimeFigureOut">
+            <a:fld id="{034BD471-22DA-4E83-B050-04D0F69AD386}" type="datetimeFigureOut">
               <a:rPr lang="en-US" smtClean="0"/>
               <a:t>11/7/2009</a:t>
             </a:fld>
@@ -41805,10 +41782,12 @@
           <a:p>
             <a:pPr marL="0" indent="0"/>
             <a:r>
-              <a:rPr lang="en"/>
+              <a:rPr lang="en" b="1">
+                <a:latin typeface="Arial"/>
+                <a:cs typeface="Arial"/>
+              </a:rPr>
               <a:t>НАША ИДЕЯ</a:t>
             </a:r>
-            <a:endParaRPr lang="en"/>
           </a:p>
         </p:txBody>
       </p:sp>
@@ -41847,10 +41826,12 @@
               <a:buNone/>
             </a:pPr>
             <a:r>
-              <a:rPr lang="en"/>
+              <a:rPr lang="en" b="1">
+                <a:latin typeface="Arial"/>
+                <a:cs typeface="Arial"/>
+              </a:rPr>
               <a:t>ВВЕДЕНИЕ</a:t>
             </a:r>
-            <a:endParaRPr lang="en"/>
           </a:p>
         </p:txBody>
       </p:sp>
@@ -41881,10 +41862,16 @@
           <a:p>
             <a:pPr marL="0" indent="0"/>
             <a:r>
-              <a:rPr lang="en" err="1"/>
+              <a:rPr lang="en" err="1">
+                <a:latin typeface="Arial"/>
+                <a:cs typeface="Arial"/>
+              </a:rPr>
               <a:t>Раздел “наша идея” должен включать в себя описание вашего продукта/услуги, как они работают и в чем заключается потребительская ценность. Вы также должны рассказать о рыночных возможностях вашего продукта/услуги</a:t>
             </a:r>
-            <a:endParaRPr lang="ru-RU" err="1"/>
+            <a:endParaRPr lang="ru-RU">
+              <a:latin typeface="Arial"/>
+              <a:cs typeface="Arial"/>
+            </a:endParaRPr>
           </a:p>
         </p:txBody>
       </p:sp>
@@ -41915,10 +41902,16 @@
           <a:p>
             <a:pPr marL="0" indent="0"/>
             <a:r>
-              <a:rPr lang="en"/>
+              <a:rPr lang="en">
+                <a:latin typeface="Arial"/>
+                <a:cs typeface="Arial"/>
+              </a:rPr>
               <a:t>Презентация вашей компании в pitch deck должна включать краткий обзор того, кто вы и чем занимаетесь. Она также должна включать краткое описание того, почему ваш продукт или услуга уникальны и какую ценность они представляют для клиентов</a:t>
             </a:r>
-            <a:endParaRPr lang="ru-RU"/>
+            <a:endParaRPr lang="ru-RU" err="1">
+              <a:latin typeface="Arial"/>
+              <a:cs typeface="Arial"/>
+            </a:endParaRPr>
           </a:p>
         </p:txBody>
       </p:sp>
@@ -41949,7 +41942,10 @@
           <a:p>
             <a:pPr marL="0" indent="0"/>
             <a:r>
-              <a:rPr lang="en"/>
+              <a:rPr lang="en" b="1">
+                <a:latin typeface="Arial"/>
+                <a:cs typeface="Arial"/>
+              </a:rPr>
               <a:t>НАША КОМПАНИЯ</a:t>
             </a:r>
           </a:p>

--- a/slides/slide_03.pptx
+++ b/slides/slide_03.pptx
@@ -861,7 +861,7 @@
           <a:bodyPr/>
           <a:lstStyle/>
           <a:p>
-            <a:fld id="{D203482D-702D-48DA-986A-E101B90E321C}" type="datetimeFigureOut">
+            <a:fld id="{2CAFAF1D-EEED-4043-8BC3-54B144184BE7}" type="datetimeFigureOut">
               <a:rPr lang="en-US" smtClean="0"/>
               <a:t>11/7/2009</a:t>
             </a:fld>
@@ -1025,7 +1025,7 @@
           <a:bodyPr/>
           <a:lstStyle/>
           <a:p>
-            <a:fld id="{881EAEB2-2DD5-48D3-B6E9-9C68DA3531A0}" type="datetimeFigureOut">
+            <a:fld id="{CD02DD35-ACAA-48AF-9265-0A0220AD1820}" type="datetimeFigureOut">
               <a:rPr lang="en-US" smtClean="0"/>
               <a:t>11/7/2009</a:t>
             </a:fld>
@@ -1189,7 +1189,7 @@
           <a:bodyPr/>
           <a:lstStyle/>
           <a:p>
-            <a:fld id="{623E786C-813F-4408-8CE1-DC08DFECCD29}" type="datetimeFigureOut">
+            <a:fld id="{05F5D523-DF49-4980-9465-0E73F5FB7D27}" type="datetimeFigureOut">
               <a:rPr lang="en-US" smtClean="0"/>
               <a:t>11/7/2009</a:t>
             </a:fld>
@@ -13094,7 +13094,7 @@
           <a:bodyPr/>
           <a:lstStyle/>
           <a:p>
-            <a:fld id="{9387875E-301A-421F-AAF8-59D3D47E7A19}" type="datetimeFigureOut">
+            <a:fld id="{8454BD3E-7F71-4A80-AA23-F3DC94C440B9}" type="datetimeFigureOut">
               <a:rPr lang="en-US" smtClean="0"/>
               <a:t>11/7/2009</a:t>
             </a:fld>
@@ -33195,7 +33195,7 @@
           <a:bodyPr/>
           <a:lstStyle/>
           <a:p>
-            <a:fld id="{C7DA3EE4-4C21-4006-A856-AA77DA46ECE0}" type="datetimeFigureOut">
+            <a:fld id="{18BAAD05-6910-49E6-822A-F141BA5E043F}" type="datetimeFigureOut">
               <a:rPr lang="en-US" smtClean="0"/>
               <a:t>11/7/2009</a:t>
             </a:fld>
@@ -38842,7 +38842,7 @@
           <a:bodyPr/>
           <a:lstStyle/>
           <a:p>
-            <a:fld id="{B2730DA2-37F9-4DD1-A1C1-67B3AAA89172}" type="datetimeFigureOut">
+            <a:fld id="{BC9DBFBE-C801-4B10-9837-ABF501B6A8D5}" type="datetimeFigureOut">
               <a:rPr lang="en-US" smtClean="0"/>
               <a:t>11/7/2009</a:t>
             </a:fld>
@@ -39231,7 +39231,7 @@
           <a:bodyPr/>
           <a:lstStyle/>
           <a:p>
-            <a:fld id="{1C60ED97-E6E1-4AD2-AFF6-1AAA0AA552F0}" type="datetimeFigureOut">
+            <a:fld id="{F45F0C3B-B1A7-4686-BA50-A3B36BF5EA54}" type="datetimeFigureOut">
               <a:rPr lang="en-US" smtClean="0"/>
               <a:t>11/7/2009</a:t>
             </a:fld>
@@ -39344,7 +39344,7 @@
           <a:bodyPr/>
           <a:lstStyle/>
           <a:p>
-            <a:fld id="{A911F494-65CB-43D4-B400-4DD5585343EC}" type="datetimeFigureOut">
+            <a:fld id="{26CCE8FC-99A6-4EB8-8E09-0240B3EC6A5D}" type="datetimeFigureOut">
               <a:rPr lang="en-US" smtClean="0"/>
               <a:t>11/7/2009</a:t>
             </a:fld>
@@ -39434,7 +39434,7 @@
           <a:bodyPr/>
           <a:lstStyle/>
           <a:p>
-            <a:fld id="{5CFB43F6-121C-499C-8F49-7ABD822A521A}" type="datetimeFigureOut">
+            <a:fld id="{21390DA0-46F2-4940-B29B-5CF2959E7012}" type="datetimeFigureOut">
               <a:rPr lang="en-US" smtClean="0"/>
               <a:t>11/7/2009</a:t>
             </a:fld>
@@ -39689,7 +39689,7 @@
           <a:bodyPr/>
           <a:lstStyle/>
           <a:p>
-            <a:fld id="{34C3BCE5-53CB-4BF3-A071-2AF9A301166C}" type="datetimeFigureOut">
+            <a:fld id="{8B4306A9-8BE6-4895-BA28-D7059AEA57F3}" type="datetimeFigureOut">
               <a:rPr lang="en-US" smtClean="0"/>
               <a:t>11/7/2009</a:t>
             </a:fld>
@@ -39921,7 +39921,7 @@
           <a:bodyPr/>
           <a:lstStyle/>
           <a:p>
-            <a:fld id="{034BD471-22DA-4E83-B050-04D0F69AD386}" type="datetimeFigureOut">
+            <a:fld id="{275A2348-5636-446A-BBA9-5B077133C539}" type="datetimeFigureOut">
               <a:rPr lang="en-US" smtClean="0"/>
               <a:t>11/7/2009</a:t>
             </a:fld>
